--- a/decks/day3/module-7-evaluation.pptx
+++ b/decks/day3/module-7-evaluation.pptx
@@ -3068,7 +3068,7 @@
                 <a:ea typeface="Calibri" pitchFamily="34" charset="-122"/>
                 <a:cs typeface="Calibri" pitchFamily="34" charset="-120"/>
               </a:rPr>
-              <a:t>Microsoft Foundry Evalutators: FoundryEvals</a:t>
+              <a:t>Microsoft Foundry Evaluators: FoundryEvals</a:t>
             </a:r>
             <a:endParaRPr lang="en-US" sz="2000" dirty="0"/>
           </a:p>
@@ -3373,8 +3373,8 @@
             <a:tbl>
               <a:tblPr/>
               <a:tblGrid>
-                <a:gridCol w="4206240"/>
-                <a:gridCol w="4206240"/>
+                <a:gridCol w="2315361"/>
+                <a:gridCol w="6097119"/>
               </a:tblGrid>
               <a:tr h="658368">
                 <a:tc>
@@ -6738,8 +6738,8 @@
             <a:tbl>
               <a:tblPr/>
               <a:tblGrid>
-                <a:gridCol w="4206240"/>
-                <a:gridCol w="4206240"/>
+                <a:gridCol w="1188720"/>
+                <a:gridCol w="7223760"/>
               </a:tblGrid>
               <a:tr h="658368">
                 <a:tc>

--- a/decks/day3/module-7-evaluation.pptx
+++ b/decks/day3/module-7-evaluation.pptx
@@ -7728,7 +7728,7 @@
         <p:spPr>
           <a:xfrm>
             <a:off x="896112" y="1335024"/>
-            <a:ext cx="1252728" cy="310896"/>
+            <a:ext cx="1252728" cy="311277"/>
           </a:xfrm>
           <a:prstGeom prst="rect">
             <a:avLst/>
@@ -7737,7 +7737,7 @@
           <a:ln/>
         </p:spPr>
         <p:txBody>
-          <a:bodyPr wrap="square" lIns="0" tIns="0" rIns="0" bIns="0" rtlCol="0" anchor="ctr">
+          <a:bodyPr wrap="square" lIns="0" tIns="0" rIns="0" bIns="0" rtlCol="0" anchor="t">
             <a:normAutofit/>
           </a:bodyPr>
           <a:lstStyle/>
@@ -7768,8 +7768,8 @@
         </p:nvSpPr>
         <p:spPr>
           <a:xfrm>
-            <a:off x="512064" y="1719072"/>
-            <a:ext cx="1618488" cy="1527048"/>
+            <a:off x="512064" y="1701165"/>
+            <a:ext cx="1618488" cy="1572387"/>
           </a:xfrm>
           <a:prstGeom prst="rect">
             <a:avLst/>
@@ -7916,7 +7916,7 @@
         <p:spPr>
           <a:xfrm>
             <a:off x="3063240" y="1335024"/>
-            <a:ext cx="1252728" cy="310896"/>
+            <a:ext cx="1252728" cy="311277"/>
           </a:xfrm>
           <a:prstGeom prst="rect">
             <a:avLst/>
@@ -7925,7 +7925,7 @@
           <a:ln/>
         </p:spPr>
         <p:txBody>
-          <a:bodyPr wrap="square" lIns="0" tIns="0" rIns="0" bIns="0" rtlCol="0" anchor="ctr">
+          <a:bodyPr wrap="square" lIns="0" tIns="0" rIns="0" bIns="0" rtlCol="0" anchor="t">
             <a:normAutofit/>
           </a:bodyPr>
           <a:lstStyle/>
@@ -7956,8 +7956,8 @@
         </p:nvSpPr>
         <p:spPr>
           <a:xfrm>
-            <a:off x="2679192" y="1719072"/>
-            <a:ext cx="1618488" cy="1527048"/>
+            <a:off x="2679192" y="1701165"/>
+            <a:ext cx="1618488" cy="1572387"/>
           </a:xfrm>
           <a:prstGeom prst="rect">
             <a:avLst/>
@@ -8104,7 +8104,7 @@
         <p:spPr>
           <a:xfrm>
             <a:off x="5230368" y="1335024"/>
-            <a:ext cx="1252728" cy="310896"/>
+            <a:ext cx="1252728" cy="311277"/>
           </a:xfrm>
           <a:prstGeom prst="rect">
             <a:avLst/>
@@ -8113,7 +8113,7 @@
           <a:ln/>
         </p:spPr>
         <p:txBody>
-          <a:bodyPr wrap="square" lIns="0" tIns="0" rIns="0" bIns="0" rtlCol="0" anchor="ctr">
+          <a:bodyPr wrap="square" lIns="0" tIns="0" rIns="0" bIns="0" rtlCol="0" anchor="t">
             <a:normAutofit/>
           </a:bodyPr>
           <a:lstStyle/>
@@ -8144,8 +8144,8 @@
         </p:nvSpPr>
         <p:spPr>
           <a:xfrm>
-            <a:off x="4846320" y="1719072"/>
-            <a:ext cx="1618488" cy="1527048"/>
+            <a:off x="4846320" y="1701165"/>
+            <a:ext cx="1618488" cy="1572387"/>
           </a:xfrm>
           <a:prstGeom prst="rect">
             <a:avLst/>
@@ -8292,7 +8292,7 @@
         <p:spPr>
           <a:xfrm>
             <a:off x="7397496" y="1335024"/>
-            <a:ext cx="1252728" cy="310896"/>
+            <a:ext cx="1252728" cy="311277"/>
           </a:xfrm>
           <a:prstGeom prst="rect">
             <a:avLst/>
@@ -8301,7 +8301,7 @@
           <a:ln/>
         </p:spPr>
         <p:txBody>
-          <a:bodyPr wrap="square" lIns="0" tIns="0" rIns="0" bIns="0" rtlCol="0" anchor="ctr">
+          <a:bodyPr wrap="square" lIns="0" tIns="0" rIns="0" bIns="0" rtlCol="0" anchor="t">
             <a:normAutofit/>
           </a:bodyPr>
           <a:lstStyle/>
@@ -8332,8 +8332,8 @@
         </p:nvSpPr>
         <p:spPr>
           <a:xfrm>
-            <a:off x="7013448" y="1719072"/>
-            <a:ext cx="1618488" cy="1527048"/>
+            <a:off x="7013448" y="1701165"/>
+            <a:ext cx="1618488" cy="1572387"/>
           </a:xfrm>
           <a:prstGeom prst="rect">
             <a:avLst/>
